--- a/HIV_2026/cours8/Classification Linéaire.pptx
+++ b/HIV_2026/cours8/Classification Linéaire.pptx
@@ -9,6 +9,7 @@
     <p:sldId id="257" r:id="rId3"/>
     <p:sldId id="258" r:id="rId4"/>
     <p:sldId id="259" r:id="rId5"/>
+    <p:sldId id="260" r:id="rId6"/>
   </p:sldIdLst>
   <p:sldSz cx="12192000" cy="6858000"/>
   <p:notesSz cx="6858000" cy="9144000"/>
@@ -268,7 +269,7 @@
           <a:p>
             <a:fld id="{D1D1EADE-8E88-4C7C-8AC5-FB148DE4940E}" type="datetime1">
               <a:rPr lang="en-US" smtClean="0"/>
-              <a:t>3/15/2026</a:t>
+              <a:t>3/17/2026</a:t>
             </a:fld>
             <a:endParaRPr lang="en-US"/>
           </a:p>
@@ -468,7 +469,7 @@
           <a:p>
             <a:fld id="{EC3C8B9C-477D-492A-96AD-1FC2CC997A73}" type="datetime1">
               <a:rPr lang="en-US" smtClean="0"/>
-              <a:t>3/15/2026</a:t>
+              <a:t>3/17/2026</a:t>
             </a:fld>
             <a:endParaRPr lang="en-US"/>
           </a:p>
@@ -678,7 +679,7 @@
           <a:p>
             <a:fld id="{42D3AED5-E26D-4E29-B1B3-7847B6779594}" type="datetime1">
               <a:rPr lang="en-US" smtClean="0"/>
-              <a:t>3/15/2026</a:t>
+              <a:t>3/17/2026</a:t>
             </a:fld>
             <a:endParaRPr lang="en-US"/>
           </a:p>
@@ -878,7 +879,7 @@
           <a:p>
             <a:fld id="{157B6794-849E-4626-908B-D15793550EFB}" type="datetime1">
               <a:rPr lang="en-US" smtClean="0"/>
-              <a:t>3/15/2026</a:t>
+              <a:t>3/17/2026</a:t>
             </a:fld>
             <a:endParaRPr lang="en-US"/>
           </a:p>
@@ -1154,7 +1155,7 @@
           <a:p>
             <a:fld id="{63DB64E7-5594-42A3-ADBF-E95A7ACEAD64}" type="datetime1">
               <a:rPr lang="en-US" smtClean="0"/>
-              <a:t>3/15/2026</a:t>
+              <a:t>3/17/2026</a:t>
             </a:fld>
             <a:endParaRPr lang="en-US"/>
           </a:p>
@@ -1427,7 +1428,7 @@
           <a:p>
             <a:fld id="{18462B0B-D248-4FFB-8695-AD7FA4B1284A}" type="datetime1">
               <a:rPr lang="en-US" smtClean="0"/>
-              <a:t>3/15/2026</a:t>
+              <a:t>3/17/2026</a:t>
             </a:fld>
             <a:endParaRPr lang="en-US"/>
           </a:p>
@@ -1850,7 +1851,7 @@
           <a:p>
             <a:fld id="{D0378EFB-9159-4510-B73F-4F0409ADE937}" type="datetime1">
               <a:rPr lang="en-US" smtClean="0"/>
-              <a:t>3/15/2026</a:t>
+              <a:t>3/17/2026</a:t>
             </a:fld>
             <a:endParaRPr lang="en-US"/>
           </a:p>
@@ -1992,7 +1993,7 @@
           <a:p>
             <a:fld id="{89BC9412-2452-4BED-A324-9D8C115361AD}" type="datetime1">
               <a:rPr lang="en-US" smtClean="0"/>
-              <a:t>3/15/2026</a:t>
+              <a:t>3/17/2026</a:t>
             </a:fld>
             <a:endParaRPr lang="en-US"/>
           </a:p>
@@ -2105,7 +2106,7 @@
           <a:p>
             <a:fld id="{F5318F62-D251-40E8-A23C-F4CFE9FEAB41}" type="datetime1">
               <a:rPr lang="en-US" smtClean="0"/>
-              <a:t>3/15/2026</a:t>
+              <a:t>3/17/2026</a:t>
             </a:fld>
             <a:endParaRPr lang="en-US"/>
           </a:p>
@@ -2418,7 +2419,7 @@
           <a:p>
             <a:fld id="{44F76144-149E-4874-93A5-554A0357CF82}" type="datetime1">
               <a:rPr lang="en-US" smtClean="0"/>
-              <a:t>3/15/2026</a:t>
+              <a:t>3/17/2026</a:t>
             </a:fld>
             <a:endParaRPr lang="en-US"/>
           </a:p>
@@ -2711,7 +2712,7 @@
           <a:p>
             <a:fld id="{50BA65D8-0540-4835-AE5C-25D29DBA01BE}" type="datetime1">
               <a:rPr lang="en-US" smtClean="0"/>
-              <a:t>3/15/2026</a:t>
+              <a:t>3/17/2026</a:t>
             </a:fld>
             <a:endParaRPr lang="en-US"/>
           </a:p>
@@ -2953,7 +2954,7 @@
           <a:p>
             <a:fld id="{E31BA835-12AC-4E8F-955A-EA3F4DE2791F}" type="datetime1">
               <a:rPr lang="en-US" smtClean="0"/>
-              <a:t>3/15/2026</a:t>
+              <a:t>3/17/2026</a:t>
             </a:fld>
             <a:endParaRPr lang="en-US"/>
           </a:p>
@@ -4245,7 +4246,7 @@
             <a:pPr lvl="1"/>
             <a:r>
               <a:rPr lang="fr-CA" dirty="0"/>
-              <a:t>Peut-on simplement effectuer une régression linéaire de  sur et classer comme Oui Y&gt;50%</a:t>
+              <a:t>Peut-on simplement effectuer une régression linéaire de Y sur X et classer comme Oui Y&gt;50%</a:t>
             </a:r>
           </a:p>
           <a:p>
@@ -4641,8 +4642,8 @@
         </p:nvSpPr>
         <p:spPr>
           <a:xfrm>
-            <a:off x="3846443" y="4048540"/>
-            <a:ext cx="3120887" cy="1053549"/>
+            <a:off x="3846443" y="3565165"/>
+            <a:ext cx="3120887" cy="1344292"/>
           </a:xfrm>
           <a:prstGeom prst="rect">
             <a:avLst/>
@@ -4698,7 +4699,17 @@
           <a:p>
             <a:r>
               <a:rPr lang="fr-CA" dirty="0"/>
-              <a:t>log(p/(1-p)) =  B0+B1X</a:t>
+              <a:t>log(p/(1-p)) =  B0+B1X ou </a:t>
+            </a:r>
+          </a:p>
+          <a:p>
+            <a:r>
+              <a:rPr lang="fr-CA" dirty="0"/>
+              <a:t>Cote = p/(1-p) = e </a:t>
+            </a:r>
+            <a:r>
+              <a:rPr lang="fr-CA" baseline="30000" dirty="0"/>
+              <a:t>B0+B1X </a:t>
             </a:r>
           </a:p>
         </p:txBody>
@@ -4707,6 +4718,188 @@
     <p:extLst>
       <p:ext uri="{BB962C8B-B14F-4D97-AF65-F5344CB8AC3E}">
         <p14:creationId xmlns:p14="http://schemas.microsoft.com/office/powerpoint/2010/main" val="1347298030"/>
+      </p:ext>
+    </p:extLst>
+  </p:cSld>
+  <p:clrMapOvr>
+    <a:masterClrMapping/>
+  </p:clrMapOvr>
+</p:sld>
+</file>
+
+<file path=ppt/slides/slide5.xml><?xml version="1.0" encoding="utf-8"?>
+<p:sld xmlns:a="http://schemas.openxmlformats.org/drawingml/2006/main" xmlns:r="http://schemas.openxmlformats.org/officeDocument/2006/relationships" xmlns:p="http://schemas.openxmlformats.org/presentationml/2006/main">
+  <p:cSld>
+    <p:spTree>
+      <p:nvGrpSpPr>
+        <p:cNvPr id="1" name=""/>
+        <p:cNvGrpSpPr/>
+        <p:nvPr/>
+      </p:nvGrpSpPr>
+      <p:grpSpPr>
+        <a:xfrm>
+          <a:off x="0" y="0"/>
+          <a:ext cx="0" cy="0"/>
+          <a:chOff x="0" y="0"/>
+          <a:chExt cx="0" cy="0"/>
+        </a:xfrm>
+      </p:grpSpPr>
+      <p:sp>
+        <p:nvSpPr>
+          <p:cNvPr id="2" name="Titre 1">
+            <a:extLst>
+              <a:ext uri="{FF2B5EF4-FFF2-40B4-BE49-F238E27FC236}">
+                <a16:creationId xmlns:a16="http://schemas.microsoft.com/office/drawing/2014/main" id="{9A8D6324-CDA6-C295-BFAE-B72C4EB22240}"/>
+              </a:ext>
+            </a:extLst>
+          </p:cNvPr>
+          <p:cNvSpPr>
+            <a:spLocks noGrp="1"/>
+          </p:cNvSpPr>
+          <p:nvPr>
+            <p:ph type="title"/>
+          </p:nvPr>
+        </p:nvSpPr>
+        <p:spPr/>
+        <p:txBody>
+          <a:bodyPr/>
+          <a:lstStyle/>
+          <a:p>
+            <a:r>
+              <a:rPr lang="fr-CA" dirty="0" err="1"/>
+              <a:t>Interpretation</a:t>
+            </a:r>
+            <a:endParaRPr lang="fr-CA" dirty="0"/>
+          </a:p>
+        </p:txBody>
+      </p:sp>
+      <p:sp>
+        <p:nvSpPr>
+          <p:cNvPr id="3" name="Espace réservé du contenu 2">
+            <a:extLst>
+              <a:ext uri="{FF2B5EF4-FFF2-40B4-BE49-F238E27FC236}">
+                <a16:creationId xmlns:a16="http://schemas.microsoft.com/office/drawing/2014/main" id="{D232D3D9-02EA-5F5A-DB94-34C30D0E3998}"/>
+              </a:ext>
+            </a:extLst>
+          </p:cNvPr>
+          <p:cNvSpPr>
+            <a:spLocks noGrp="1"/>
+          </p:cNvSpPr>
+          <p:nvPr>
+            <p:ph idx="1"/>
+          </p:nvPr>
+        </p:nvSpPr>
+        <p:spPr/>
+        <p:txBody>
+          <a:bodyPr/>
+          <a:lstStyle/>
+          <a:p>
+            <a:r>
+              <a:rPr lang="fr-CA" dirty="0"/>
+              <a:t>B0 </a:t>
+            </a:r>
+          </a:p>
+          <a:p>
+            <a:pPr lvl="1"/>
+            <a:r>
+              <a:rPr lang="fr-CA" dirty="0"/>
+              <a:t>Cote = e</a:t>
+            </a:r>
+            <a:r>
+              <a:rPr lang="fr-CA" sz="1600" baseline="30000" dirty="0"/>
+              <a:t>B0</a:t>
+            </a:r>
+            <a:r>
+              <a:rPr lang="fr-CA" dirty="0"/>
+              <a:t>  lorsque X = 0</a:t>
+            </a:r>
+          </a:p>
+          <a:p>
+            <a:pPr lvl="1"/>
+            <a:endParaRPr lang="fr-CA" dirty="0"/>
+          </a:p>
+          <a:p>
+            <a:r>
+              <a:rPr lang="fr-CA" dirty="0"/>
+              <a:t>B1</a:t>
+            </a:r>
+          </a:p>
+          <a:p>
+            <a:pPr lvl="1"/>
+            <a:r>
+              <a:rPr lang="fr-CA" dirty="0"/>
+              <a:t>Cote1 = e</a:t>
+            </a:r>
+            <a:r>
+              <a:rPr lang="fr-CA" baseline="30000" dirty="0"/>
+              <a:t>B0+B1X </a:t>
+            </a:r>
+          </a:p>
+          <a:p>
+            <a:pPr lvl="1"/>
+            <a:r>
+              <a:rPr lang="fr-CA" dirty="0"/>
+              <a:t>Cote2 = e</a:t>
+            </a:r>
+            <a:r>
+              <a:rPr lang="fr-CA" baseline="30000" dirty="0"/>
+              <a:t>B0+B1(X+1)</a:t>
+            </a:r>
+          </a:p>
+          <a:p>
+            <a:pPr lvl="1"/>
+            <a:r>
+              <a:rPr lang="fr-CA" dirty="0"/>
+              <a:t>Cote2/Cote1 = e</a:t>
+            </a:r>
+            <a:r>
+              <a:rPr lang="fr-CA" baseline="30000" dirty="0"/>
+              <a:t>B0+B1X </a:t>
+            </a:r>
+            <a:r>
+              <a:rPr lang="fr-CA" dirty="0"/>
+              <a:t>/e</a:t>
+            </a:r>
+            <a:r>
+              <a:rPr lang="fr-CA" baseline="30000" dirty="0"/>
+              <a:t>B0+B1(X+1)</a:t>
+            </a:r>
+          </a:p>
+          <a:p>
+            <a:pPr lvl="1"/>
+            <a:r>
+              <a:rPr lang="fr-CA" dirty="0"/>
+              <a:t>Cote2/Cote1 = e</a:t>
+            </a:r>
+            <a:r>
+              <a:rPr lang="fr-CA" baseline="30000" dirty="0"/>
+              <a:t>B1</a:t>
+            </a:r>
+          </a:p>
+          <a:p>
+            <a:pPr marL="457200" lvl="1" indent="0">
+              <a:buNone/>
+            </a:pPr>
+            <a:r>
+              <a:rPr lang="fr-CA" dirty="0"/>
+              <a:t> La cote de P(Y=1) est multipliée par e</a:t>
+            </a:r>
+            <a:r>
+              <a:rPr lang="fr-CA" baseline="30000" dirty="0"/>
+              <a:t>B1</a:t>
+            </a:r>
+            <a:r>
+              <a:rPr lang="fr-CA" dirty="0"/>
+              <a:t> lorsque X augmente d’une unité</a:t>
+            </a:r>
+            <a:endParaRPr lang="fr-CA" baseline="30000" dirty="0"/>
+          </a:p>
+        </p:txBody>
+      </p:sp>
+    </p:spTree>
+    <p:extLst>
+      <p:ext uri="{BB962C8B-B14F-4D97-AF65-F5344CB8AC3E}">
+        <p14:creationId xmlns:p14="http://schemas.microsoft.com/office/powerpoint/2010/main" val="1151317706"/>
       </p:ext>
     </p:extLst>
   </p:cSld>
